--- a/instructors/06_Being-precise_v2.1.pptx
+++ b/instructors/06_Being-precise_v2.1.pptx
@@ -13092,7 +13092,7 @@
                 <a:latin typeface="Calibri" panose="020F0502020204030204" pitchFamily="34" charset="0"/>
                 <a:ea typeface="Calibri" panose="020F0502020204030204" pitchFamily="34" charset="0"/>
               </a:rPr>
-              <a:t>Using broadly applicable, standardised terms </a:t>
+              <a:t>Using controlled vocabularies</a:t>
             </a:r>
           </a:p>
           <a:p>
